--- a/实习答辩PPT .pptx
+++ b/实习答辩PPT .pptx
@@ -2313,7 +2313,7 @@
         </p:nvSpPr>
         <p:spPr>
           <a:xfrm>
-            <a:off x="548640" y="411480"/>
+            <a:off x="548640" y="457200"/>
             <a:ext cx="11064240" cy="0"/>
           </a:xfrm>
           <a:prstGeom prst="line">
@@ -3615,7 +3615,7 @@
         </p:nvSpPr>
         <p:spPr>
           <a:xfrm>
-            <a:off x="548640" y="411480"/>
+            <a:off x="548640" y="457200"/>
             <a:ext cx="11064240" cy="0"/>
           </a:xfrm>
           <a:prstGeom prst="line">
@@ -5461,7 +5461,7 @@
         </p:nvSpPr>
         <p:spPr>
           <a:xfrm>
-            <a:off x="548640" y="411480"/>
+            <a:off x="548640" y="463550"/>
             <a:ext cx="11064240" cy="0"/>
           </a:xfrm>
           <a:prstGeom prst="line">
@@ -6530,7 +6530,7 @@
         </p:nvSpPr>
         <p:spPr>
           <a:xfrm>
-            <a:off x="548640" y="411480"/>
+            <a:off x="548640" y="457200"/>
             <a:ext cx="11064240" cy="0"/>
           </a:xfrm>
           <a:prstGeom prst="line">
@@ -7646,7 +7646,7 @@
         </p:nvSpPr>
         <p:spPr>
           <a:xfrm>
-            <a:off x="548640" y="228600"/>
+            <a:off x="548640" y="176530"/>
             <a:ext cx="5486400" cy="228600"/>
           </a:xfrm>
           <a:prstGeom prst="rect">
@@ -10451,7 +10451,7 @@
         </p:nvSpPr>
         <p:spPr>
           <a:xfrm>
-            <a:off x="548640" y="411480"/>
+            <a:off x="548640" y="508000"/>
             <a:ext cx="11064240" cy="0"/>
           </a:xfrm>
           <a:prstGeom prst="line">
@@ -13808,7 +13808,7 @@
         </p:nvSpPr>
         <p:spPr>
           <a:xfrm>
-            <a:off x="548640" y="411480"/>
+            <a:off x="489585" y="548640"/>
             <a:ext cx="11064240" cy="0"/>
           </a:xfrm>
           <a:prstGeom prst="line">
@@ -15371,7 +15371,7 @@
         </p:nvSpPr>
         <p:spPr>
           <a:xfrm>
-            <a:off x="548640" y="411480"/>
+            <a:off x="548640" y="457200"/>
             <a:ext cx="11064240" cy="0"/>
           </a:xfrm>
           <a:prstGeom prst="line">
